--- a/愛你到底.pptx
+++ b/愛你到底.pptx
@@ -167,7 +167,7 @@
           <a:lstStyle/>
           <a:p>
             <a:r>
-              <a:rPr lang="en-US" altLang="zh-TW" smtClean="0"/>
+              <a:rPr lang="en-US" altLang="zh-TW"/>
               <a:t>Click to edit Master title style</a:t>
             </a:r>
             <a:endParaRPr lang="zh-TW" altLang="en-US"/>
@@ -286,7 +286,7 @@
           </a:lstStyle>
           <a:p>
             <a:r>
-              <a:rPr lang="en-US" altLang="zh-TW" smtClean="0"/>
+              <a:rPr lang="en-US" altLang="zh-TW"/>
               <a:t>Click to edit Master subtitle style</a:t>
             </a:r>
             <a:endParaRPr lang="zh-TW" altLang="en-US"/>
@@ -310,7 +310,7 @@
           <a:p>
             <a:fld id="{15B063F0-611E-4397-9783-E936F54D9428}" type="datetimeFigureOut">
               <a:rPr lang="en-US" smtClean="0"/>
-              <a:t>7/7/2023</a:t>
+              <a:t>7/27/2024</a:t>
             </a:fld>
             <a:endParaRPr lang="en-US"/>
           </a:p>
@@ -399,7 +399,7 @@
           <a:lstStyle/>
           <a:p>
             <a:r>
-              <a:rPr lang="en-US" altLang="zh-TW" smtClean="0"/>
+              <a:rPr lang="en-US" altLang="zh-TW"/>
               <a:t>Click to edit Master title style</a:t>
             </a:r>
             <a:endParaRPr lang="zh-TW" altLang="en-US"/>
@@ -423,35 +423,35 @@
           <a:p>
             <a:pPr lvl="0"/>
             <a:r>
-              <a:rPr lang="en-US" altLang="zh-TW" smtClean="0"/>
+              <a:rPr lang="en-US" altLang="zh-TW"/>
               <a:t>Click to edit Master text styles</a:t>
             </a:r>
           </a:p>
           <a:p>
             <a:pPr lvl="1"/>
             <a:r>
-              <a:rPr lang="en-US" altLang="zh-TW" smtClean="0"/>
+              <a:rPr lang="en-US" altLang="zh-TW"/>
               <a:t>Second level</a:t>
             </a:r>
           </a:p>
           <a:p>
             <a:pPr lvl="2"/>
             <a:r>
-              <a:rPr lang="en-US" altLang="zh-TW" smtClean="0"/>
+              <a:rPr lang="en-US" altLang="zh-TW"/>
               <a:t>Third level</a:t>
             </a:r>
           </a:p>
           <a:p>
             <a:pPr lvl="3"/>
             <a:r>
-              <a:rPr lang="en-US" altLang="zh-TW" smtClean="0"/>
+              <a:rPr lang="en-US" altLang="zh-TW"/>
               <a:t>Fourth level</a:t>
             </a:r>
           </a:p>
           <a:p>
             <a:pPr lvl="4"/>
             <a:r>
-              <a:rPr lang="en-US" altLang="zh-TW" smtClean="0"/>
+              <a:rPr lang="en-US" altLang="zh-TW"/>
               <a:t>Fifth level</a:t>
             </a:r>
             <a:endParaRPr lang="zh-TW" altLang="en-US"/>
@@ -475,7 +475,7 @@
           <a:p>
             <a:fld id="{15B063F0-611E-4397-9783-E936F54D9428}" type="datetimeFigureOut">
               <a:rPr lang="en-US" smtClean="0"/>
-              <a:t>7/7/2023</a:t>
+              <a:t>7/27/2024</a:t>
             </a:fld>
             <a:endParaRPr lang="en-US"/>
           </a:p>
@@ -569,7 +569,7 @@
           <a:lstStyle/>
           <a:p>
             <a:r>
-              <a:rPr lang="en-US" altLang="zh-TW" smtClean="0"/>
+              <a:rPr lang="en-US" altLang="zh-TW"/>
               <a:t>Click to edit Master title style</a:t>
             </a:r>
             <a:endParaRPr lang="zh-TW" altLang="en-US"/>
@@ -598,35 +598,35 @@
           <a:p>
             <a:pPr lvl="0"/>
             <a:r>
-              <a:rPr lang="en-US" altLang="zh-TW" smtClean="0"/>
+              <a:rPr lang="en-US" altLang="zh-TW"/>
               <a:t>Click to edit Master text styles</a:t>
             </a:r>
           </a:p>
           <a:p>
             <a:pPr lvl="1"/>
             <a:r>
-              <a:rPr lang="en-US" altLang="zh-TW" smtClean="0"/>
+              <a:rPr lang="en-US" altLang="zh-TW"/>
               <a:t>Second level</a:t>
             </a:r>
           </a:p>
           <a:p>
             <a:pPr lvl="2"/>
             <a:r>
-              <a:rPr lang="en-US" altLang="zh-TW" smtClean="0"/>
+              <a:rPr lang="en-US" altLang="zh-TW"/>
               <a:t>Third level</a:t>
             </a:r>
           </a:p>
           <a:p>
             <a:pPr lvl="3"/>
             <a:r>
-              <a:rPr lang="en-US" altLang="zh-TW" smtClean="0"/>
+              <a:rPr lang="en-US" altLang="zh-TW"/>
               <a:t>Fourth level</a:t>
             </a:r>
           </a:p>
           <a:p>
             <a:pPr lvl="4"/>
             <a:r>
-              <a:rPr lang="en-US" altLang="zh-TW" smtClean="0"/>
+              <a:rPr lang="en-US" altLang="zh-TW"/>
               <a:t>Fifth level</a:t>
             </a:r>
             <a:endParaRPr lang="zh-TW" altLang="en-US"/>
@@ -650,7 +650,7 @@
           <a:p>
             <a:fld id="{15B063F0-611E-4397-9783-E936F54D9428}" type="datetimeFigureOut">
               <a:rPr lang="en-US" smtClean="0"/>
-              <a:t>7/7/2023</a:t>
+              <a:t>7/27/2024</a:t>
             </a:fld>
             <a:endParaRPr lang="en-US"/>
           </a:p>
@@ -739,7 +739,7 @@
           <a:lstStyle/>
           <a:p>
             <a:r>
-              <a:rPr lang="en-US" altLang="zh-TW" smtClean="0"/>
+              <a:rPr lang="en-US" altLang="zh-TW"/>
               <a:t>Click to edit Master title style</a:t>
             </a:r>
             <a:endParaRPr lang="zh-TW" altLang="en-US"/>
@@ -763,35 +763,35 @@
           <a:p>
             <a:pPr lvl="0"/>
             <a:r>
-              <a:rPr lang="en-US" altLang="zh-TW" smtClean="0"/>
+              <a:rPr lang="en-US" altLang="zh-TW"/>
               <a:t>Click to edit Master text styles</a:t>
             </a:r>
           </a:p>
           <a:p>
             <a:pPr lvl="1"/>
             <a:r>
-              <a:rPr lang="en-US" altLang="zh-TW" smtClean="0"/>
+              <a:rPr lang="en-US" altLang="zh-TW"/>
               <a:t>Second level</a:t>
             </a:r>
           </a:p>
           <a:p>
             <a:pPr lvl="2"/>
             <a:r>
-              <a:rPr lang="en-US" altLang="zh-TW" smtClean="0"/>
+              <a:rPr lang="en-US" altLang="zh-TW"/>
               <a:t>Third level</a:t>
             </a:r>
           </a:p>
           <a:p>
             <a:pPr lvl="3"/>
             <a:r>
-              <a:rPr lang="en-US" altLang="zh-TW" smtClean="0"/>
+              <a:rPr lang="en-US" altLang="zh-TW"/>
               <a:t>Fourth level</a:t>
             </a:r>
           </a:p>
           <a:p>
             <a:pPr lvl="4"/>
             <a:r>
-              <a:rPr lang="en-US" altLang="zh-TW" smtClean="0"/>
+              <a:rPr lang="en-US" altLang="zh-TW"/>
               <a:t>Fifth level</a:t>
             </a:r>
             <a:endParaRPr lang="zh-TW" altLang="en-US"/>
@@ -815,7 +815,7 @@
           <a:p>
             <a:fld id="{15B063F0-611E-4397-9783-E936F54D9428}" type="datetimeFigureOut">
               <a:rPr lang="en-US" smtClean="0"/>
-              <a:t>7/7/2023</a:t>
+              <a:t>7/27/2024</a:t>
             </a:fld>
             <a:endParaRPr lang="en-US"/>
           </a:p>
@@ -913,7 +913,7 @@
           </a:lstStyle>
           <a:p>
             <a:r>
-              <a:rPr lang="en-US" altLang="zh-TW" smtClean="0"/>
+              <a:rPr lang="en-US" altLang="zh-TW"/>
               <a:t>Click to edit Master title style</a:t>
             </a:r>
             <a:endParaRPr lang="zh-TW" altLang="en-US"/>
@@ -1033,7 +1033,7 @@
           <a:p>
             <a:pPr lvl="0"/>
             <a:r>
-              <a:rPr lang="en-US" altLang="zh-TW" smtClean="0"/>
+              <a:rPr lang="en-US" altLang="zh-TW"/>
               <a:t>Click to edit Master text styles</a:t>
             </a:r>
           </a:p>
@@ -1056,7 +1056,7 @@
           <a:p>
             <a:fld id="{15B063F0-611E-4397-9783-E936F54D9428}" type="datetimeFigureOut">
               <a:rPr lang="en-US" smtClean="0"/>
-              <a:t>7/7/2023</a:t>
+              <a:t>7/27/2024</a:t>
             </a:fld>
             <a:endParaRPr lang="en-US"/>
           </a:p>
@@ -1145,7 +1145,7 @@
           <a:lstStyle/>
           <a:p>
             <a:r>
-              <a:rPr lang="en-US" altLang="zh-TW" smtClean="0"/>
+              <a:rPr lang="en-US" altLang="zh-TW"/>
               <a:t>Click to edit Master title style</a:t>
             </a:r>
             <a:endParaRPr lang="zh-TW" altLang="en-US"/>
@@ -1202,35 +1202,35 @@
           <a:p>
             <a:pPr lvl="0"/>
             <a:r>
-              <a:rPr lang="en-US" altLang="zh-TW" smtClean="0"/>
+              <a:rPr lang="en-US" altLang="zh-TW"/>
               <a:t>Click to edit Master text styles</a:t>
             </a:r>
           </a:p>
           <a:p>
             <a:pPr lvl="1"/>
             <a:r>
-              <a:rPr lang="en-US" altLang="zh-TW" smtClean="0"/>
+              <a:rPr lang="en-US" altLang="zh-TW"/>
               <a:t>Second level</a:t>
             </a:r>
           </a:p>
           <a:p>
             <a:pPr lvl="2"/>
             <a:r>
-              <a:rPr lang="en-US" altLang="zh-TW" smtClean="0"/>
+              <a:rPr lang="en-US" altLang="zh-TW"/>
               <a:t>Third level</a:t>
             </a:r>
           </a:p>
           <a:p>
             <a:pPr lvl="3"/>
             <a:r>
-              <a:rPr lang="en-US" altLang="zh-TW" smtClean="0"/>
+              <a:rPr lang="en-US" altLang="zh-TW"/>
               <a:t>Fourth level</a:t>
             </a:r>
           </a:p>
           <a:p>
             <a:pPr lvl="4"/>
             <a:r>
-              <a:rPr lang="en-US" altLang="zh-TW" smtClean="0"/>
+              <a:rPr lang="en-US" altLang="zh-TW"/>
               <a:t>Fifth level</a:t>
             </a:r>
             <a:endParaRPr lang="zh-TW" altLang="en-US"/>
@@ -1287,35 +1287,35 @@
           <a:p>
             <a:pPr lvl="0"/>
             <a:r>
-              <a:rPr lang="en-US" altLang="zh-TW" smtClean="0"/>
+              <a:rPr lang="en-US" altLang="zh-TW"/>
               <a:t>Click to edit Master text styles</a:t>
             </a:r>
           </a:p>
           <a:p>
             <a:pPr lvl="1"/>
             <a:r>
-              <a:rPr lang="en-US" altLang="zh-TW" smtClean="0"/>
+              <a:rPr lang="en-US" altLang="zh-TW"/>
               <a:t>Second level</a:t>
             </a:r>
           </a:p>
           <a:p>
             <a:pPr lvl="2"/>
             <a:r>
-              <a:rPr lang="en-US" altLang="zh-TW" smtClean="0"/>
+              <a:rPr lang="en-US" altLang="zh-TW"/>
               <a:t>Third level</a:t>
             </a:r>
           </a:p>
           <a:p>
             <a:pPr lvl="3"/>
             <a:r>
-              <a:rPr lang="en-US" altLang="zh-TW" smtClean="0"/>
+              <a:rPr lang="en-US" altLang="zh-TW"/>
               <a:t>Fourth level</a:t>
             </a:r>
           </a:p>
           <a:p>
             <a:pPr lvl="4"/>
             <a:r>
-              <a:rPr lang="en-US" altLang="zh-TW" smtClean="0"/>
+              <a:rPr lang="en-US" altLang="zh-TW"/>
               <a:t>Fifth level</a:t>
             </a:r>
             <a:endParaRPr lang="zh-TW" altLang="en-US"/>
@@ -1339,7 +1339,7 @@
           <a:p>
             <a:fld id="{15B063F0-611E-4397-9783-E936F54D9428}" type="datetimeFigureOut">
               <a:rPr lang="en-US" smtClean="0"/>
-              <a:t>7/7/2023</a:t>
+              <a:t>7/27/2024</a:t>
             </a:fld>
             <a:endParaRPr lang="en-US"/>
           </a:p>
@@ -1432,7 +1432,7 @@
           </a:lstStyle>
           <a:p>
             <a:r>
-              <a:rPr lang="en-US" altLang="zh-TW" smtClean="0"/>
+              <a:rPr lang="en-US" altLang="zh-TW"/>
               <a:t>Click to edit Master title style</a:t>
             </a:r>
             <a:endParaRPr lang="zh-TW" altLang="en-US"/>
@@ -1498,7 +1498,7 @@
           <a:p>
             <a:pPr lvl="0"/>
             <a:r>
-              <a:rPr lang="en-US" altLang="zh-TW" smtClean="0"/>
+              <a:rPr lang="en-US" altLang="zh-TW"/>
               <a:t>Click to edit Master text styles</a:t>
             </a:r>
           </a:p>
@@ -1554,35 +1554,35 @@
           <a:p>
             <a:pPr lvl="0"/>
             <a:r>
-              <a:rPr lang="en-US" altLang="zh-TW" smtClean="0"/>
+              <a:rPr lang="en-US" altLang="zh-TW"/>
               <a:t>Click to edit Master text styles</a:t>
             </a:r>
           </a:p>
           <a:p>
             <a:pPr lvl="1"/>
             <a:r>
-              <a:rPr lang="en-US" altLang="zh-TW" smtClean="0"/>
+              <a:rPr lang="en-US" altLang="zh-TW"/>
               <a:t>Second level</a:t>
             </a:r>
           </a:p>
           <a:p>
             <a:pPr lvl="2"/>
             <a:r>
-              <a:rPr lang="en-US" altLang="zh-TW" smtClean="0"/>
+              <a:rPr lang="en-US" altLang="zh-TW"/>
               <a:t>Third level</a:t>
             </a:r>
           </a:p>
           <a:p>
             <a:pPr lvl="3"/>
             <a:r>
-              <a:rPr lang="en-US" altLang="zh-TW" smtClean="0"/>
+              <a:rPr lang="en-US" altLang="zh-TW"/>
               <a:t>Fourth level</a:t>
             </a:r>
           </a:p>
           <a:p>
             <a:pPr lvl="4"/>
             <a:r>
-              <a:rPr lang="en-US" altLang="zh-TW" smtClean="0"/>
+              <a:rPr lang="en-US" altLang="zh-TW"/>
               <a:t>Fifth level</a:t>
             </a:r>
             <a:endParaRPr lang="zh-TW" altLang="en-US"/>
@@ -1648,7 +1648,7 @@
           <a:p>
             <a:pPr lvl="0"/>
             <a:r>
-              <a:rPr lang="en-US" altLang="zh-TW" smtClean="0"/>
+              <a:rPr lang="en-US" altLang="zh-TW"/>
               <a:t>Click to edit Master text styles</a:t>
             </a:r>
           </a:p>
@@ -1704,35 +1704,35 @@
           <a:p>
             <a:pPr lvl="0"/>
             <a:r>
-              <a:rPr lang="en-US" altLang="zh-TW" smtClean="0"/>
+              <a:rPr lang="en-US" altLang="zh-TW"/>
               <a:t>Click to edit Master text styles</a:t>
             </a:r>
           </a:p>
           <a:p>
             <a:pPr lvl="1"/>
             <a:r>
-              <a:rPr lang="en-US" altLang="zh-TW" smtClean="0"/>
+              <a:rPr lang="en-US" altLang="zh-TW"/>
               <a:t>Second level</a:t>
             </a:r>
           </a:p>
           <a:p>
             <a:pPr lvl="2"/>
             <a:r>
-              <a:rPr lang="en-US" altLang="zh-TW" smtClean="0"/>
+              <a:rPr lang="en-US" altLang="zh-TW"/>
               <a:t>Third level</a:t>
             </a:r>
           </a:p>
           <a:p>
             <a:pPr lvl="3"/>
             <a:r>
-              <a:rPr lang="en-US" altLang="zh-TW" smtClean="0"/>
+              <a:rPr lang="en-US" altLang="zh-TW"/>
               <a:t>Fourth level</a:t>
             </a:r>
           </a:p>
           <a:p>
             <a:pPr lvl="4"/>
             <a:r>
-              <a:rPr lang="en-US" altLang="zh-TW" smtClean="0"/>
+              <a:rPr lang="en-US" altLang="zh-TW"/>
               <a:t>Fifth level</a:t>
             </a:r>
             <a:endParaRPr lang="zh-TW" altLang="en-US"/>
@@ -1756,7 +1756,7 @@
           <a:p>
             <a:fld id="{15B063F0-611E-4397-9783-E936F54D9428}" type="datetimeFigureOut">
               <a:rPr lang="en-US" smtClean="0"/>
-              <a:t>7/7/2023</a:t>
+              <a:t>7/27/2024</a:t>
             </a:fld>
             <a:endParaRPr lang="en-US"/>
           </a:p>
@@ -1845,7 +1845,7 @@
           <a:lstStyle/>
           <a:p>
             <a:r>
-              <a:rPr lang="en-US" altLang="zh-TW" smtClean="0"/>
+              <a:rPr lang="en-US" altLang="zh-TW"/>
               <a:t>Click to edit Master title style</a:t>
             </a:r>
             <a:endParaRPr lang="zh-TW" altLang="en-US"/>
@@ -1869,7 +1869,7 @@
           <a:p>
             <a:fld id="{15B063F0-611E-4397-9783-E936F54D9428}" type="datetimeFigureOut">
               <a:rPr lang="en-US" smtClean="0"/>
-              <a:t>7/7/2023</a:t>
+              <a:t>7/27/2024</a:t>
             </a:fld>
             <a:endParaRPr lang="en-US"/>
           </a:p>
@@ -1959,7 +1959,7 @@
           <a:p>
             <a:fld id="{15B063F0-611E-4397-9783-E936F54D9428}" type="datetimeFigureOut">
               <a:rPr lang="en-US" smtClean="0"/>
-              <a:t>7/7/2023</a:t>
+              <a:t>7/27/2024</a:t>
             </a:fld>
             <a:endParaRPr lang="en-US"/>
           </a:p>
@@ -2057,7 +2057,7 @@
           </a:lstStyle>
           <a:p>
             <a:r>
-              <a:rPr lang="en-US" altLang="zh-TW" smtClean="0"/>
+              <a:rPr lang="en-US" altLang="zh-TW"/>
               <a:t>Click to edit Master title style</a:t>
             </a:r>
             <a:endParaRPr lang="zh-TW" altLang="en-US"/>
@@ -2114,35 +2114,35 @@
           <a:p>
             <a:pPr lvl="0"/>
             <a:r>
-              <a:rPr lang="en-US" altLang="zh-TW" smtClean="0"/>
+              <a:rPr lang="en-US" altLang="zh-TW"/>
               <a:t>Click to edit Master text styles</a:t>
             </a:r>
           </a:p>
           <a:p>
             <a:pPr lvl="1"/>
             <a:r>
-              <a:rPr lang="en-US" altLang="zh-TW" smtClean="0"/>
+              <a:rPr lang="en-US" altLang="zh-TW"/>
               <a:t>Second level</a:t>
             </a:r>
           </a:p>
           <a:p>
             <a:pPr lvl="2"/>
             <a:r>
-              <a:rPr lang="en-US" altLang="zh-TW" smtClean="0"/>
+              <a:rPr lang="en-US" altLang="zh-TW"/>
               <a:t>Third level</a:t>
             </a:r>
           </a:p>
           <a:p>
             <a:pPr lvl="3"/>
             <a:r>
-              <a:rPr lang="en-US" altLang="zh-TW" smtClean="0"/>
+              <a:rPr lang="en-US" altLang="zh-TW"/>
               <a:t>Fourth level</a:t>
             </a:r>
           </a:p>
           <a:p>
             <a:pPr lvl="4"/>
             <a:r>
-              <a:rPr lang="en-US" altLang="zh-TW" smtClean="0"/>
+              <a:rPr lang="en-US" altLang="zh-TW"/>
               <a:t>Fifth level</a:t>
             </a:r>
             <a:endParaRPr lang="zh-TW" altLang="en-US"/>
@@ -2208,7 +2208,7 @@
           <a:p>
             <a:pPr lvl="0"/>
             <a:r>
-              <a:rPr lang="en-US" altLang="zh-TW" smtClean="0"/>
+              <a:rPr lang="en-US" altLang="zh-TW"/>
               <a:t>Click to edit Master text styles</a:t>
             </a:r>
           </a:p>
@@ -2231,7 +2231,7 @@
           <a:p>
             <a:fld id="{15B063F0-611E-4397-9783-E936F54D9428}" type="datetimeFigureOut">
               <a:rPr lang="en-US" smtClean="0"/>
-              <a:t>7/7/2023</a:t>
+              <a:t>7/27/2024</a:t>
             </a:fld>
             <a:endParaRPr lang="en-US"/>
           </a:p>
@@ -2329,7 +2329,7 @@
           </a:lstStyle>
           <a:p>
             <a:r>
-              <a:rPr lang="en-US" altLang="zh-TW" smtClean="0"/>
+              <a:rPr lang="en-US" altLang="zh-TW"/>
               <a:t>Click to edit Master title style</a:t>
             </a:r>
             <a:endParaRPr lang="zh-TW" altLang="en-US"/>
@@ -2394,7 +2394,7 @@
           </a:lstStyle>
           <a:p>
             <a:r>
-              <a:rPr lang="en-US" altLang="zh-TW" smtClean="0"/>
+              <a:rPr lang="en-US" altLang="zh-TW"/>
               <a:t>Click icon to add picture</a:t>
             </a:r>
             <a:endParaRPr lang="zh-TW" altLang="en-US"/>
@@ -2460,7 +2460,7 @@
           <a:p>
             <a:pPr lvl="0"/>
             <a:r>
-              <a:rPr lang="en-US" altLang="zh-TW" smtClean="0"/>
+              <a:rPr lang="en-US" altLang="zh-TW"/>
               <a:t>Click to edit Master text styles</a:t>
             </a:r>
           </a:p>
@@ -2483,7 +2483,7 @@
           <a:p>
             <a:fld id="{15B063F0-611E-4397-9783-E936F54D9428}" type="datetimeFigureOut">
               <a:rPr lang="en-US" smtClean="0"/>
-              <a:t>7/7/2023</a:t>
+              <a:t>7/27/2024</a:t>
             </a:fld>
             <a:endParaRPr lang="en-US"/>
           </a:p>
@@ -2592,10 +2592,9 @@
           <a:lstStyle/>
           <a:p>
             <a:r>
-              <a:rPr lang="zh-TW" altLang="en-US" smtClean="0"/>
+              <a:rPr lang="zh-TW" altLang="en-US"/>
               <a:t>按一下以編輯母片標題樣式</a:t>
             </a:r>
-            <a:endParaRPr lang="zh-TW" altLang="en-US"/>
           </a:p>
         </p:txBody>
       </p:sp>
@@ -2626,38 +2625,37 @@
           <a:p>
             <a:pPr lvl="0"/>
             <a:r>
-              <a:rPr lang="zh-TW" altLang="en-US" smtClean="0"/>
+              <a:rPr lang="zh-TW" altLang="en-US"/>
               <a:t>按一下以編輯母片文字樣式</a:t>
             </a:r>
           </a:p>
           <a:p>
             <a:pPr lvl="1"/>
             <a:r>
-              <a:rPr lang="zh-TW" altLang="en-US" smtClean="0"/>
+              <a:rPr lang="zh-TW" altLang="en-US"/>
               <a:t>第二層</a:t>
             </a:r>
           </a:p>
           <a:p>
             <a:pPr lvl="2"/>
             <a:r>
-              <a:rPr lang="zh-TW" altLang="en-US" smtClean="0"/>
+              <a:rPr lang="zh-TW" altLang="en-US"/>
               <a:t>第三層</a:t>
             </a:r>
           </a:p>
           <a:p>
             <a:pPr lvl="3"/>
             <a:r>
-              <a:rPr lang="zh-TW" altLang="en-US" smtClean="0"/>
+              <a:rPr lang="zh-TW" altLang="en-US"/>
               <a:t>第四層</a:t>
             </a:r>
           </a:p>
           <a:p>
             <a:pPr lvl="4"/>
             <a:r>
-              <a:rPr lang="zh-TW" altLang="en-US" smtClean="0"/>
+              <a:rPr lang="zh-TW" altLang="en-US"/>
               <a:t>第五層</a:t>
             </a:r>
-            <a:endParaRPr lang="zh-TW" altLang="en-US"/>
           </a:p>
         </p:txBody>
       </p:sp>
@@ -2696,7 +2694,7 @@
           <a:p>
             <a:fld id="{15B063F0-611E-4397-9783-E936F54D9428}" type="datetimeFigureOut">
               <a:rPr lang="en-US" smtClean="0"/>
-              <a:t>7/7/2023</a:t>
+              <a:t>7/27/2024</a:t>
             </a:fld>
             <a:endParaRPr lang="en-US"/>
           </a:p>
@@ -3137,24 +3135,7 @@
                 <a:latin typeface="微軟正黑體" pitchFamily="34" charset="-120"/>
                 <a:ea typeface="微軟正黑體" pitchFamily="34" charset="-120"/>
               </a:rPr>
-              <a:t>到</a:t>
-            </a:r>
-            <a:r>
-              <a:rPr lang="zh-CN" altLang="en-US" sz="7200" b="1" i="1" dirty="0">
-                <a:solidFill>
-                  <a:srgbClr val="660033"/>
-                </a:solidFill>
-                <a:effectLst>
-                  <a:outerShdw blurRad="38100" dist="38100" dir="2700000" algn="tl">
-                    <a:srgbClr val="000000">
-                      <a:alpha val="43137"/>
-                    </a:srgbClr>
-                  </a:outerShdw>
-                </a:effectLst>
-                <a:latin typeface="微軟正黑體" pitchFamily="34" charset="-120"/>
-                <a:ea typeface="微軟正黑體" pitchFamily="34" charset="-120"/>
-              </a:rPr>
-              <a:t>底</a:t>
+              <a:t>到底</a:t>
             </a:r>
             <a:endParaRPr lang="zh-TW" altLang="en-US" sz="7200" b="1" i="1" dirty="0">
               <a:solidFill>
@@ -3236,37 +3217,7 @@
                 <a:latin typeface="微軟正黑體" pitchFamily="34" charset="-120"/>
                 <a:ea typeface="微軟正黑體" pitchFamily="34" charset="-120"/>
               </a:rPr>
-              <a:t>來</a:t>
-            </a:r>
-            <a:r>
-              <a:rPr lang="zh-TW" altLang="en-US" sz="6400" b="1" dirty="0">
-                <a:solidFill>
-                  <a:srgbClr val="660033"/>
-                </a:solidFill>
-                <a:latin typeface="微軟正黑體" pitchFamily="34" charset="-120"/>
-                <a:ea typeface="微軟正黑體" pitchFamily="34" charset="-120"/>
-              </a:rPr>
-              <a:t>到主前 </a:t>
-            </a:r>
-            <a:r>
-              <a:rPr lang="zh-TW" altLang="en-US" sz="6400" b="1" dirty="0">
-                <a:solidFill>
-                  <a:srgbClr val="660033"/>
-                </a:solidFill>
-                <a:latin typeface="微軟正黑體" pitchFamily="34" charset="-120"/>
-                <a:ea typeface="微軟正黑體" pitchFamily="34" charset="-120"/>
-              </a:rPr>
-              <a:t> 卸</a:t>
-            </a:r>
-            <a:r>
-              <a:rPr lang="zh-TW" altLang="en-US" sz="6400" b="1" dirty="0">
-                <a:solidFill>
-                  <a:srgbClr val="660033"/>
-                </a:solidFill>
-                <a:latin typeface="微軟正黑體" pitchFamily="34" charset="-120"/>
-                <a:ea typeface="微軟正黑體" pitchFamily="34" charset="-120"/>
-              </a:rPr>
-              <a:t>下一切憂慮重擔 </a:t>
+              <a:t>來到主前  卸下一切憂慮重擔 </a:t>
             </a:r>
             <a:endParaRPr lang="en-US" altLang="zh-TW" sz="6400" b="1" dirty="0">
               <a:solidFill>
@@ -3341,7 +3292,7 @@
                 <a:latin typeface="Microsoft JhengHei" panose="020B0604030504040204" pitchFamily="34" charset="-120"/>
                 <a:ea typeface="Microsoft JhengHei" panose="020B0604030504040204" pitchFamily="34" charset="-120"/>
               </a:rPr>
-              <a:t>正</a:t>
+              <a:t>正歌</a:t>
             </a:r>
             <a:r>
               <a:rPr lang="en-US" sz="3200" b="1" dirty="0">
@@ -3425,27 +3376,7 @@
                 <a:latin typeface="微軟正黑體" pitchFamily="34" charset="-120"/>
                 <a:ea typeface="微軟正黑體" pitchFamily="34" charset="-120"/>
               </a:rPr>
-              <a:t>疲憊的心 </a:t>
-            </a:r>
-            <a:r>
-              <a:rPr lang="zh-TW" altLang="en-US" sz="6400" b="1" dirty="0">
-                <a:solidFill>
-                  <a:srgbClr val="660033"/>
-                </a:solidFill>
-                <a:latin typeface="微軟正黑體" pitchFamily="34" charset="-120"/>
-                <a:ea typeface="微軟正黑體" pitchFamily="34" charset="-120"/>
-              </a:rPr>
-              <a:t> 在</a:t>
-            </a:r>
-            <a:r>
-              <a:rPr lang="zh-TW" altLang="en-US" sz="6400" b="1" dirty="0">
-                <a:solidFill>
-                  <a:srgbClr val="660033"/>
-                </a:solidFill>
-                <a:latin typeface="微軟正黑體" pitchFamily="34" charset="-120"/>
-                <a:ea typeface="微軟正黑體" pitchFamily="34" charset="-120"/>
-              </a:rPr>
-              <a:t>祢裡面重新得力 </a:t>
+              <a:t>疲憊的心  在祢裡面重新得力 </a:t>
             </a:r>
             <a:endParaRPr lang="en-US" altLang="zh-TW" sz="6400" b="1" dirty="0">
               <a:solidFill>
@@ -3520,7 +3451,7 @@
                 <a:latin typeface="Microsoft JhengHei" panose="020B0604030504040204" pitchFamily="34" charset="-120"/>
                 <a:ea typeface="Microsoft JhengHei" panose="020B0604030504040204" pitchFamily="34" charset="-120"/>
               </a:rPr>
-              <a:t>正</a:t>
+              <a:t>正歌</a:t>
             </a:r>
             <a:r>
               <a:rPr lang="en-US" sz="3200" b="1" dirty="0">
@@ -3679,7 +3610,7 @@
                 <a:latin typeface="Microsoft JhengHei" panose="020B0604030504040204" pitchFamily="34" charset="-120"/>
                 <a:ea typeface="Microsoft JhengHei" panose="020B0604030504040204" pitchFamily="34" charset="-120"/>
               </a:rPr>
-              <a:t>副</a:t>
+              <a:t>副歌</a:t>
             </a:r>
             <a:r>
               <a:rPr lang="en-US" sz="3200" b="1" dirty="0">
@@ -3763,27 +3694,7 @@
                 <a:latin typeface="微軟正黑體" pitchFamily="34" charset="-120"/>
                 <a:ea typeface="微軟正黑體" pitchFamily="34" charset="-120"/>
               </a:rPr>
-              <a:t>全心相</a:t>
-            </a:r>
-            <a:r>
-              <a:rPr lang="zh-TW" altLang="en-US" sz="6400" b="1" dirty="0">
-                <a:solidFill>
-                  <a:srgbClr val="660033"/>
-                </a:solidFill>
-                <a:latin typeface="微軟正黑體" pitchFamily="34" charset="-120"/>
-                <a:ea typeface="微軟正黑體" pitchFamily="34" charset="-120"/>
-              </a:rPr>
-              <a:t>信  萬</a:t>
-            </a:r>
-            <a:r>
-              <a:rPr lang="zh-TW" altLang="en-US" sz="6400" b="1" dirty="0">
-                <a:solidFill>
-                  <a:srgbClr val="660033"/>
-                </a:solidFill>
-                <a:latin typeface="微軟正黑體" pitchFamily="34" charset="-120"/>
-                <a:ea typeface="微軟正黑體" pitchFamily="34" charset="-120"/>
-              </a:rPr>
-              <a:t>事都互相效力 </a:t>
+              <a:t>全心相信  萬事都互相效力 </a:t>
             </a:r>
             <a:endParaRPr lang="en-US" altLang="zh-TW" sz="6400" b="1" dirty="0">
               <a:solidFill>
@@ -3858,7 +3769,7 @@
                 <a:latin typeface="Microsoft JhengHei" panose="020B0604030504040204" pitchFamily="34" charset="-120"/>
                 <a:ea typeface="Microsoft JhengHei" panose="020B0604030504040204" pitchFamily="34" charset="-120"/>
               </a:rPr>
-              <a:t>副</a:t>
+              <a:t>副歌</a:t>
             </a:r>
             <a:r>
               <a:rPr lang="en-US" sz="3200" b="1" dirty="0">
@@ -3964,17 +3875,7 @@
                 <a:latin typeface="微軟正黑體" pitchFamily="34" charset="-120"/>
                 <a:ea typeface="微軟正黑體" pitchFamily="34" charset="-120"/>
               </a:rPr>
-              <a:t>全心讚美  耶穌的</a:t>
-            </a:r>
-            <a:r>
-              <a:rPr lang="zh-TW" altLang="en-US" sz="6400" b="1" dirty="0">
-                <a:solidFill>
-                  <a:srgbClr val="660033"/>
-                </a:solidFill>
-                <a:latin typeface="微軟正黑體" pitchFamily="34" charset="-120"/>
-                <a:ea typeface="微軟正黑體" pitchFamily="34" charset="-120"/>
-              </a:rPr>
-              <a:t>名</a:t>
+              <a:t>全心讚美  耶穌的名</a:t>
             </a:r>
             <a:endParaRPr lang="en-US" altLang="zh-TW" sz="6400" b="1" dirty="0">
               <a:solidFill>
